--- a/Reflex_Executive_Deck.pptx
+++ b/Reflex_Executive_Deck.pptx
@@ -3183,7 +3183,7 @@
                 <a:ea typeface="Calibri" pitchFamily="34" charset="-122"/>
                 <a:cs typeface="Calibri" pitchFamily="34" charset="-120"/>
               </a:rPr>
-              <a:t>QR proof of delivery</a:t>
+              <a:t>Delivery-code proof, ratings, stuck-in-transit detection</a:t>
             </a:r>
             <a:endParaRPr lang="en-US" sz="1200" dirty="0"/>
           </a:p>
@@ -6777,7 +6777,7 @@
                 <a:ea typeface="Cambria" pitchFamily="34" charset="-122"/>
                 <a:cs typeface="Cambria" pitchFamily="34" charset="-120"/>
               </a:rPr>
-              <a:t>Scans to confirm</a:t>
+              <a:t>Confirms with a code</a:t>
             </a:r>
             <a:endParaRPr lang="en-US" sz="1500" dirty="0"/>
           </a:p>
@@ -6816,7 +6816,7 @@
                 <a:ea typeface="Calibri" pitchFamily="34" charset="-122"/>
                 <a:cs typeface="Calibri" pitchFamily="34" charset="-120"/>
               </a:rPr>
-              <a:t>QR scan at the door closes out the delivery</a:t>
+              <a:t>Server-generated code, validated and single-use, closes it out</a:t>
             </a:r>
             <a:endParaRPr lang="en-US" sz="1150" dirty="0"/>
           </a:p>
@@ -10271,7 +10271,7 @@
                 <a:ea typeface="Calibri" pitchFamily="34" charset="-122"/>
                 <a:cs typeface="Calibri" pitchFamily="34" charset="-120"/>
               </a:rPr>
-              <a:t>QR scan proves a scan happened, not the right parcel arrived</a:t>
+              <a:t>Delivery codes are meaningful proof, but not full chain-of-custody evidence</a:t>
             </a:r>
             <a:endParaRPr lang="en-US" sz="1100" dirty="0"/>
           </a:p>
@@ -10335,7 +10335,7 @@
                 <a:ea typeface="Calibri" pitchFamily="34" charset="-122"/>
                 <a:cs typeface="Calibri" pitchFamily="34" charset="-120"/>
               </a:rPr>
-              <a:t>Already a major step up from a voice note saying "delivered"</a:t>
+              <a:t>A server-validated, single-use code beats an unverified "delivered" message</a:t>
             </a:r>
             <a:endParaRPr lang="en-US" sz="1100" dirty="0"/>
           </a:p>
@@ -10399,7 +10399,7 @@
                 <a:ea typeface="Calibri" pitchFamily="34" charset="-122"/>
                 <a:cs typeface="Calibri" pitchFamily="34" charset="-120"/>
               </a:rPr>
-              <a:t>Add photo or customer PIN confirmation at the door</a:t>
+              <a:t>Add photo/signature evidence or a stronger customer PIN for high-value orders</a:t>
             </a:r>
             <a:endParaRPr lang="en-US" sz="1100" dirty="0"/>
           </a:p>
